--- a/exports/pptx/lessons/middle-module-01-what-is-iks/day-09-project-session-2.pptx
+++ b/exports/pptx/lessons/middle-module-01-what-is-iks/day-09-project-session-2.pptx
@@ -14,9 +14,11 @@
     <p:sldId id="262" r:id="rId8"/>
     <p:sldId id="263" r:id="rId9"/>
     <p:sldId id="264" r:id="rId10"/>
+    <p:sldId id="265" r:id="rId11"/>
+    <p:sldId id="266" r:id="rId12"/>
   </p:sldIdLst>
   <p:notesMasterIdLst>
-    <p:notesMasterId r:id="rId11"/>
+    <p:notesMasterId r:id="rId13"/>
   </p:notesMasterIdLst>
   <p:sldSz cx="9144000" cy="5143500"/>
   <p:notesSz cx="5143500" cy="9144000"/>
@@ -534,6 +536,182 @@
             <a:fld id="{F7021451-1387-4CA6-816F-3879F97B5CBC}" type="slidenum">
               <a:rPr lang="en-US"/>
               <a:t>1</a:t>
+            </a:fld>
+            <a:endParaRPr lang="en-US"/>
+          </a:p>
+        </p:txBody>
+      </p:sp>
+    </p:spTree>
+    <p:extLst>
+      <p:ext uri="{BB962C8B-B14F-4D97-AF65-F5344CB8AC3E}">
+        <p14:creationId xmlns:p14="http://schemas.microsoft.com/office/powerpoint/2010/main" val="1024086991"/>
+      </p:ext>
+    </p:extLst>
+  </p:cSld>
+  <p:clrMapOvr>
+    <a:masterClrMapping/>
+  </p:clrMapOvr>
+</p:notes>
+</file>
+
+<file path=ppt/notesSlides/notesSlide10.xml><?xml version="1.0" encoding="utf-8"?>
+<p:notes xmlns:a="http://schemas.openxmlformats.org/drawingml/2006/main" xmlns:r="http://schemas.openxmlformats.org/officeDocument/2006/relationships" xmlns:p="http://schemas.openxmlformats.org/presentationml/2006/main">
+  <p:cSld>
+    <p:spTree>
+      <p:nvGrpSpPr>
+        <p:cNvPr id="1" name=""/>
+        <p:cNvGrpSpPr/>
+        <p:nvPr/>
+      </p:nvGrpSpPr>
+      <p:grpSpPr>
+        <a:xfrm>
+          <a:off x="0" y="0"/>
+          <a:ext cx="0" cy="0"/>
+          <a:chOff x="0" y="0"/>
+          <a:chExt cx="0" cy="0"/>
+        </a:xfrm>
+      </p:grpSpPr>
+      <p:sp>
+        <p:nvSpPr>
+          <p:cNvPr id="2" name="Slide Image Placeholder 1"/>
+          <p:cNvSpPr>
+            <a:spLocks noGrp="1" noRot="1" noChangeAspect="1"/>
+          </p:cNvSpPr>
+          <p:nvPr>
+            <p:ph type="sldImg"/>
+          </p:nvPr>
+        </p:nvSpPr>
+        <p:spPr/>
+      </p:sp>
+      <p:sp>
+        <p:nvSpPr>
+          <p:cNvPr id="3" name="Notes Placeholder 2"/>
+          <p:cNvSpPr>
+            <a:spLocks noGrp="1"/>
+          </p:cNvSpPr>
+          <p:nvPr>
+            <p:ph type="body" idx="1"/>
+          </p:nvPr>
+        </p:nvSpPr>
+        <p:spPr/>
+        <p:txBody>
+          <a:bodyPr/>
+          <a:lstStyle/>
+          <a:p>
+            <a:r>
+              <a:rPr lang="en-US" dirty="0"/>
+              <a:t/>
+            </a:r>
+            <a:endParaRPr lang="en-US" dirty="0"/>
+          </a:p>
+        </p:txBody>
+      </p:sp>
+      <p:sp>
+        <p:nvSpPr>
+          <p:cNvPr id="4" name="Slide Number Placeholder 3"/>
+          <p:cNvSpPr>
+            <a:spLocks noGrp="1"/>
+          </p:cNvSpPr>
+          <p:nvPr>
+            <p:ph type="sldNum" sz="quarter" idx="10"/>
+          </p:nvPr>
+        </p:nvSpPr>
+        <p:spPr/>
+        <p:txBody>
+          <a:bodyPr/>
+          <a:lstStyle/>
+          <a:p>
+            <a:fld id="{F7021451-1387-4CA6-816F-3879F97B5CBC}" type="slidenum">
+              <a:rPr lang="en-US"/>
+              <a:t>10</a:t>
+            </a:fld>
+            <a:endParaRPr lang="en-US"/>
+          </a:p>
+        </p:txBody>
+      </p:sp>
+    </p:spTree>
+    <p:extLst>
+      <p:ext uri="{BB962C8B-B14F-4D97-AF65-F5344CB8AC3E}">
+        <p14:creationId xmlns:p14="http://schemas.microsoft.com/office/powerpoint/2010/main" val="1024086991"/>
+      </p:ext>
+    </p:extLst>
+  </p:cSld>
+  <p:clrMapOvr>
+    <a:masterClrMapping/>
+  </p:clrMapOvr>
+</p:notes>
+</file>
+
+<file path=ppt/notesSlides/notesSlide11.xml><?xml version="1.0" encoding="utf-8"?>
+<p:notes xmlns:a="http://schemas.openxmlformats.org/drawingml/2006/main" xmlns:r="http://schemas.openxmlformats.org/officeDocument/2006/relationships" xmlns:p="http://schemas.openxmlformats.org/presentationml/2006/main">
+  <p:cSld>
+    <p:spTree>
+      <p:nvGrpSpPr>
+        <p:cNvPr id="1" name=""/>
+        <p:cNvGrpSpPr/>
+        <p:nvPr/>
+      </p:nvGrpSpPr>
+      <p:grpSpPr>
+        <a:xfrm>
+          <a:off x="0" y="0"/>
+          <a:ext cx="0" cy="0"/>
+          <a:chOff x="0" y="0"/>
+          <a:chExt cx="0" cy="0"/>
+        </a:xfrm>
+      </p:grpSpPr>
+      <p:sp>
+        <p:nvSpPr>
+          <p:cNvPr id="2" name="Slide Image Placeholder 1"/>
+          <p:cNvSpPr>
+            <a:spLocks noGrp="1" noRot="1" noChangeAspect="1"/>
+          </p:cNvSpPr>
+          <p:nvPr>
+            <p:ph type="sldImg"/>
+          </p:nvPr>
+        </p:nvSpPr>
+        <p:spPr/>
+      </p:sp>
+      <p:sp>
+        <p:nvSpPr>
+          <p:cNvPr id="3" name="Notes Placeholder 2"/>
+          <p:cNvSpPr>
+            <a:spLocks noGrp="1"/>
+          </p:cNvSpPr>
+          <p:nvPr>
+            <p:ph type="body" idx="1"/>
+          </p:nvPr>
+        </p:nvSpPr>
+        <p:spPr/>
+        <p:txBody>
+          <a:bodyPr/>
+          <a:lstStyle/>
+          <a:p>
+            <a:r>
+              <a:rPr lang="en-US" dirty="0"/>
+              <a:t/>
+            </a:r>
+            <a:endParaRPr lang="en-US" dirty="0"/>
+          </a:p>
+        </p:txBody>
+      </p:sp>
+      <p:sp>
+        <p:nvSpPr>
+          <p:cNvPr id="4" name="Slide Number Placeholder 3"/>
+          <p:cNvSpPr>
+            <a:spLocks noGrp="1"/>
+          </p:cNvSpPr>
+          <p:nvPr>
+            <p:ph type="sldNum" sz="quarter" idx="10"/>
+          </p:nvPr>
+        </p:nvSpPr>
+        <p:spPr/>
+        <p:txBody>
+          <a:bodyPr/>
+          <a:lstStyle/>
+          <a:p>
+            <a:fld id="{F7021451-1387-4CA6-816F-3879F97B5CBC}" type="slidenum">
+              <a:rPr lang="en-US"/>
+              <a:t>11</a:t>
             </a:fld>
             <a:endParaRPr lang="en-US"/>
           </a:p>
@@ -1787,7 +1965,117 @@
         </p:nvSpPr>
         <p:spPr>
           <a:xfrm>
-            <a:off x="406301" y="1223963"/>
+            <a:off x="406301" y="4434929"/>
+            <a:ext cx="8498026" cy="213271"/>
+          </a:xfrm>
+          <a:prstGeom prst="rect">
+            <a:avLst/>
+          </a:prstGeom>
+          <a:noFill/>
+          <a:ln/>
+        </p:spPr>
+        <p:txBody>
+          <a:bodyPr wrap="square" lIns="0" tIns="0" rIns="0" bIns="0" rtlCol="0" anchor="t"/>
+          <a:lstStyle/>
+          <a:p>
+            <a:pPr algn="l" indent="0" marL="0">
+              <a:lnSpc>
+                <a:spcPts val="1680"/>
+              </a:lnSpc>
+              <a:spcBef>
+                <a:spcPts val="300"/>
+              </a:spcBef>
+              <a:spcAft>
+                <a:spcPts val="300"/>
+              </a:spcAft>
+              <a:buNone/>
+            </a:pPr>
+            <a:r>
+              <a:rPr lang="en-US" sz="1200" dirty="0">
+                <a:solidFill>
+                  <a:srgbClr val="1C2833"/>
+                </a:solidFill>
+                <a:latin typeface="Arial" pitchFamily="34" charset="0"/>
+                <a:ea typeface="Arial" pitchFamily="34" charset="-122"/>
+                <a:cs typeface="Arial" pitchFamily="34" charset="-120"/>
+              </a:rPr>
+              <a:t>Middle ·  · IKS Curriculum</a:t>
+            </a:r>
+            <a:endParaRPr lang="en-US" sz="1200" dirty="0"/>
+          </a:p>
+        </p:txBody>
+      </p:sp>
+    </p:spTree>
+  </p:cSld>
+  <p:clrMapOvr>
+    <a:masterClrMapping/>
+  </p:clrMapOvr>
+</p:sld>
+</file>
+
+<file path=ppt/slides/slide10.xml><?xml version="1.0" encoding="utf-8"?>
+<p:sld xmlns:a="http://schemas.openxmlformats.org/drawingml/2006/main" xmlns:r="http://schemas.openxmlformats.org/officeDocument/2006/relationships" xmlns:p="http://schemas.openxmlformats.org/presentationml/2006/main">
+  <p:cSld name="Slide 10">
+    <p:bg>
+      <p:bgPr>
+        <a:solidFill>
+          <a:srgbClr val="FFFFFF"/>
+        </a:solidFill>
+      </p:bgPr>
+    </p:bg>
+    <p:spTree>
+      <p:nvGrpSpPr>
+        <p:cNvPr id="1" name=""/>
+        <p:cNvGrpSpPr/>
+        <p:nvPr/>
+      </p:nvGrpSpPr>
+      <p:grpSpPr>
+        <a:xfrm>
+          <a:off x="0" y="0"/>
+          <a:ext cx="0" cy="0"/>
+          <a:chOff x="0" y="0"/>
+          <a:chExt cx="0" cy="0"/>
+        </a:xfrm>
+      </p:grpSpPr>
+      <p:sp>
+        <p:nvSpPr>
+          <p:cNvPr id="2" name="Text 0"/>
+          <p:cNvSpPr/>
+          <p:nvPr/>
+        </p:nvSpPr>
+        <p:spPr>
+          <a:xfrm>
+            <a:off x="0" y="0"/>
+            <a:ext cx="9144000" cy="101501"/>
+          </a:xfrm>
+          <a:prstGeom prst="rect">
+            <a:avLst/>
+          </a:prstGeom>
+          <a:solidFill>
+            <a:srgbClr val="277884"/>
+          </a:solidFill>
+          <a:ln/>
+        </p:spPr>
+        <p:txBody>
+          <a:bodyPr wrap="square" rtlCol="0" anchor="ctr"/>
+          <a:lstStyle/>
+          <a:p>
+            <a:pPr indent="0" marL="0">
+              <a:buNone/>
+            </a:pPr>
+            <a:endParaRPr lang="en-US" dirty="0"/>
+          </a:p>
+        </p:txBody>
+      </p:sp>
+      <p:sp>
+        <p:nvSpPr>
+          <p:cNvPr id="3" name="Text 1"/>
+          <p:cNvSpPr/>
+          <p:nvPr/>
+        </p:nvSpPr>
+        <p:spPr>
+          <a:xfrm>
+            <a:off x="406301" y="457051"/>
             <a:ext cx="8498026" cy="274290"/>
           </a:xfrm>
           <a:prstGeom prst="rect">
@@ -1821,7 +2109,7 @@
                 <a:ea typeface="Georgia" pitchFamily="34" charset="-122"/>
                 <a:cs typeface="Georgia" pitchFamily="34" charset="-120"/>
               </a:rPr>
-              <a:t>Learning objective</a:t>
+              <a:t>Differentiation</a:t>
             </a:r>
             <a:endParaRPr lang="en-US" sz="1800" dirty="0"/>
           </a:p>
@@ -1829,14 +2117,14 @@
       </p:sp>
       <p:sp>
         <p:nvSpPr>
-          <p:cNvPr id="6" name="Text 4"/>
+          <p:cNvPr id="4" name="Text 2"/>
           <p:cNvSpPr/>
           <p:nvPr/>
         </p:nvSpPr>
         <p:spPr>
           <a:xfrm>
-            <a:off x="406301" y="1637854"/>
-            <a:ext cx="8498026" cy="213271"/>
+            <a:off x="634901" y="883593"/>
+            <a:ext cx="8102798" cy="525661"/>
           </a:xfrm>
           <a:prstGeom prst="rect">
             <a:avLst/>
@@ -1848,20 +2136,18 @@
           <a:bodyPr wrap="square" lIns="0" tIns="0" rIns="0" bIns="0" rtlCol="0" anchor="t"/>
           <a:lstStyle/>
           <a:p>
-            <a:pPr algn="l" indent="0" marL="0">
-              <a:lnSpc>
-                <a:spcPts val="1680"/>
-              </a:lnSpc>
-              <a:spcBef>
-                <a:spcPts val="300"/>
-              </a:spcBef>
-              <a:spcAft>
-                <a:spcPts val="300"/>
-              </a:spcAft>
-              <a:buNone/>
-            </a:pPr>
-            <a:r>
-              <a:rPr lang="en-US" sz="1200" dirty="0">
+            <a:pPr algn="l" marL="342900" indent="-342900">
+              <a:lnSpc>
+                <a:spcPts val="1620"/>
+              </a:lnSpc>
+              <a:spcAft>
+                <a:spcPts val="300"/>
+              </a:spcAft>
+              <a:buSzPct val="100000"/>
+              <a:buChar char="•"/>
+            </a:pPr>
+            <a:r>
+              <a:rPr lang="en-US" sz="1200" b="1" dirty="0">
                 <a:solidFill>
                   <a:srgbClr val="1C2833"/>
                 </a:solidFill>
@@ -1869,15 +2155,323 @@
                 <a:ea typeface="Arial" pitchFamily="34" charset="-122"/>
                 <a:cs typeface="Arial" pitchFamily="34" charset="-120"/>
               </a:rPr>
-              <a:t>Each student rehearses their 5-min presentation end-to-end with timed feedback from a buddy.</a:t>
+              <a:t>Tier up:</a:t>
+            </a:r>
+            <a:pPr algn="l" indent="0" marL="0">
+              <a:lnSpc>
+                <a:spcPts val="1620"/>
+              </a:lnSpc>
+              <a:spcAft>
+                <a:spcPts val="300"/>
+              </a:spcAft>
+              <a:buNone/>
+            </a:pPr>
+            <a:r>
+              <a:rPr lang="en-US" sz="1200" dirty="0">
+                <a:solidFill>
+                  <a:srgbClr val="1C2833"/>
+                </a:solidFill>
+                <a:latin typeface="Arial" pitchFamily="34" charset="0"/>
+                <a:ea typeface="Arial" pitchFamily="34" charset="-122"/>
+                <a:cs typeface="Arial" pitchFamily="34" charset="-120"/>
+              </a:rPr>
+              <a:t> Anticipate the toughest audience question and prepare a 30-sec answer.</a:t>
             </a:r>
             <a:endParaRPr lang="en-US" sz="1200" dirty="0"/>
           </a:p>
-        </p:txBody>
-      </p:sp>
-      <p:sp>
-        <p:nvSpPr>
-          <p:cNvPr id="7" name="Text 5"/>
+          <a:p>
+            <a:pPr algn="l" marL="342900" indent="-342900">
+              <a:lnSpc>
+                <a:spcPts val="1620"/>
+              </a:lnSpc>
+              <a:spcAft>
+                <a:spcPts val="300"/>
+              </a:spcAft>
+              <a:buSzPct val="100000"/>
+              <a:buChar char="•"/>
+            </a:pPr>
+            <a:r>
+              <a:rPr lang="en-US" sz="1200" b="1" dirty="0">
+                <a:solidFill>
+                  <a:srgbClr val="1C2833"/>
+                </a:solidFill>
+                <a:latin typeface="Arial" pitchFamily="34" charset="0"/>
+                <a:ea typeface="Arial" pitchFamily="34" charset="-122"/>
+                <a:cs typeface="Arial" pitchFamily="34" charset="-120"/>
+              </a:rPr>
+              <a:t>Tier down:</a:t>
+            </a:r>
+            <a:pPr algn="l" indent="0" marL="0">
+              <a:lnSpc>
+                <a:spcPts val="1620"/>
+              </a:lnSpc>
+              <a:spcAft>
+                <a:spcPts val="300"/>
+              </a:spcAft>
+              <a:buNone/>
+            </a:pPr>
+            <a:r>
+              <a:rPr lang="en-US" sz="1200" dirty="0">
+                <a:solidFill>
+                  <a:srgbClr val="1C2833"/>
+                </a:solidFill>
+                <a:latin typeface="Arial" pitchFamily="34" charset="0"/>
+                <a:ea typeface="Arial" pitchFamily="34" charset="-122"/>
+                <a:cs typeface="Arial" pitchFamily="34" charset="-120"/>
+              </a:rPr>
+              <a:t> Read from notes during presentation if needed.</a:t>
+            </a:r>
+            <a:endParaRPr lang="en-US" sz="1200" dirty="0"/>
+          </a:p>
+        </p:txBody>
+      </p:sp>
+      <p:sp>
+        <p:nvSpPr>
+          <p:cNvPr id="5" name="Text 3"/>
+          <p:cNvSpPr/>
+          <p:nvPr/>
+        </p:nvSpPr>
+        <p:spPr>
+          <a:xfrm>
+            <a:off x="406301" y="4434929"/>
+            <a:ext cx="8498026" cy="213271"/>
+          </a:xfrm>
+          <a:prstGeom prst="rect">
+            <a:avLst/>
+          </a:prstGeom>
+          <a:noFill/>
+          <a:ln/>
+        </p:spPr>
+        <p:txBody>
+          <a:bodyPr wrap="square" lIns="0" tIns="0" rIns="0" bIns="0" rtlCol="0" anchor="t"/>
+          <a:lstStyle/>
+          <a:p>
+            <a:pPr algn="l" indent="0" marL="0">
+              <a:lnSpc>
+                <a:spcPts val="1680"/>
+              </a:lnSpc>
+              <a:spcBef>
+                <a:spcPts val="300"/>
+              </a:spcBef>
+              <a:spcAft>
+                <a:spcPts val="300"/>
+              </a:spcAft>
+              <a:buNone/>
+            </a:pPr>
+            <a:r>
+              <a:rPr lang="en-US" sz="1200" dirty="0">
+                <a:solidFill>
+                  <a:srgbClr val="1C2833"/>
+                </a:solidFill>
+                <a:latin typeface="Arial" pitchFamily="34" charset="0"/>
+                <a:ea typeface="Arial" pitchFamily="34" charset="-122"/>
+                <a:cs typeface="Arial" pitchFamily="34" charset="-120"/>
+              </a:rPr>
+              <a:t>Middle ·  · IKS Curriculum</a:t>
+            </a:r>
+            <a:endParaRPr lang="en-US" sz="1200" dirty="0"/>
+          </a:p>
+        </p:txBody>
+      </p:sp>
+    </p:spTree>
+  </p:cSld>
+  <p:clrMapOvr>
+    <a:masterClrMapping/>
+  </p:clrMapOvr>
+</p:sld>
+</file>
+
+<file path=ppt/slides/slide11.xml><?xml version="1.0" encoding="utf-8"?>
+<p:sld xmlns:a="http://schemas.openxmlformats.org/drawingml/2006/main" xmlns:r="http://schemas.openxmlformats.org/officeDocument/2006/relationships" xmlns:p="http://schemas.openxmlformats.org/presentationml/2006/main">
+  <p:cSld name="Slide 11">
+    <p:bg>
+      <p:bgPr>
+        <a:solidFill>
+          <a:srgbClr val="FFFFFF"/>
+        </a:solidFill>
+      </p:bgPr>
+    </p:bg>
+    <p:spTree>
+      <p:nvGrpSpPr>
+        <p:cNvPr id="1" name=""/>
+        <p:cNvGrpSpPr/>
+        <p:nvPr/>
+      </p:nvGrpSpPr>
+      <p:grpSpPr>
+        <a:xfrm>
+          <a:off x="0" y="0"/>
+          <a:ext cx="0" cy="0"/>
+          <a:chOff x="0" y="0"/>
+          <a:chExt cx="0" cy="0"/>
+        </a:xfrm>
+      </p:grpSpPr>
+      <p:sp>
+        <p:nvSpPr>
+          <p:cNvPr id="2" name="Text 0"/>
+          <p:cNvSpPr/>
+          <p:nvPr/>
+        </p:nvSpPr>
+        <p:spPr>
+          <a:xfrm>
+            <a:off x="0" y="0"/>
+            <a:ext cx="9144000" cy="101501"/>
+          </a:xfrm>
+          <a:prstGeom prst="rect">
+            <a:avLst/>
+          </a:prstGeom>
+          <a:solidFill>
+            <a:srgbClr val="277884"/>
+          </a:solidFill>
+          <a:ln/>
+        </p:spPr>
+        <p:txBody>
+          <a:bodyPr wrap="square" rtlCol="0" anchor="ctr"/>
+          <a:lstStyle/>
+          <a:p>
+            <a:pPr indent="0" marL="0">
+              <a:buNone/>
+            </a:pPr>
+            <a:endParaRPr lang="en-US" dirty="0"/>
+          </a:p>
+        </p:txBody>
+      </p:sp>
+      <p:sp>
+        <p:nvSpPr>
+          <p:cNvPr id="3" name="Text 1"/>
+          <p:cNvSpPr/>
+          <p:nvPr/>
+        </p:nvSpPr>
+        <p:spPr>
+          <a:xfrm>
+            <a:off x="406301" y="457051"/>
+            <a:ext cx="8498026" cy="274290"/>
+          </a:xfrm>
+          <a:prstGeom prst="rect">
+            <a:avLst/>
+          </a:prstGeom>
+          <a:noFill/>
+          <a:ln/>
+        </p:spPr>
+        <p:txBody>
+          <a:bodyPr wrap="square" lIns="0" tIns="0" rIns="0" bIns="0" rtlCol="0" anchor="t"/>
+          <a:lstStyle/>
+          <a:p>
+            <a:pPr algn="l" indent="0" marL="0">
+              <a:lnSpc>
+                <a:spcPts val="2160"/>
+              </a:lnSpc>
+              <a:spcBef>
+                <a:spcPts val="600"/>
+              </a:spcBef>
+              <a:spcAft>
+                <a:spcPts val="800"/>
+              </a:spcAft>
+              <a:buNone/>
+            </a:pPr>
+            <a:r>
+              <a:rPr lang="en-US" sz="1800" b="1" dirty="0">
+                <a:solidFill>
+                  <a:srgbClr val="FE4447"/>
+                </a:solidFill>
+                <a:latin typeface="Georgia" pitchFamily="34" charset="0"/>
+                <a:ea typeface="Georgia" pitchFamily="34" charset="-122"/>
+                <a:cs typeface="Georgia" pitchFamily="34" charset="-120"/>
+              </a:rPr>
+              <a:t>Teacher notes</a:t>
+            </a:r>
+            <a:endParaRPr lang="en-US" sz="1800" dirty="0"/>
+          </a:p>
+        </p:txBody>
+      </p:sp>
+      <p:sp>
+        <p:nvSpPr>
+          <p:cNvPr id="4" name="Text 2"/>
+          <p:cNvSpPr/>
+          <p:nvPr/>
+        </p:nvSpPr>
+        <p:spPr>
+          <a:xfrm>
+            <a:off x="634901" y="883593"/>
+            <a:ext cx="8102798" cy="281880"/>
+          </a:xfrm>
+          <a:prstGeom prst="rect">
+            <a:avLst/>
+          </a:prstGeom>
+          <a:noFill/>
+          <a:ln/>
+        </p:spPr>
+        <p:txBody>
+          <a:bodyPr wrap="square" lIns="0" tIns="0" rIns="0" bIns="0" rtlCol="0" anchor="t"/>
+          <a:lstStyle/>
+          <a:p>
+            <a:pPr algn="l" marL="342900" indent="-342900">
+              <a:lnSpc>
+                <a:spcPts val="1620"/>
+              </a:lnSpc>
+              <a:spcAft>
+                <a:spcPts val="300"/>
+              </a:spcAft>
+              <a:buSzPct val="100000"/>
+              <a:buChar char="•"/>
+            </a:pPr>
+            <a:r>
+              <a:rPr lang="en-US" sz="1200" dirty="0">
+                <a:solidFill>
+                  <a:srgbClr val="1C2833"/>
+                </a:solidFill>
+                <a:latin typeface="Arial" pitchFamily="34" charset="0"/>
+                <a:ea typeface="Arial" pitchFamily="34" charset="-122"/>
+                <a:cs typeface="Arial" pitchFamily="34" charset="-120"/>
+              </a:rPr>
+              <a:t>The buddy rehearsal is the most useful feedback. Encourage </a:t>
+            </a:r>
+            <a:pPr algn="l" indent="0" marL="0">
+              <a:lnSpc>
+                <a:spcPts val="1620"/>
+              </a:lnSpc>
+              <a:spcAft>
+                <a:spcPts val="300"/>
+              </a:spcAft>
+              <a:buNone/>
+            </a:pPr>
+            <a:r>
+              <a:rPr lang="en-US" sz="1200" i="1" dirty="0">
+                <a:solidFill>
+                  <a:srgbClr val="1C2833"/>
+                </a:solidFill>
+                <a:latin typeface="Arial" pitchFamily="34" charset="0"/>
+                <a:ea typeface="Arial" pitchFamily="34" charset="-122"/>
+                <a:cs typeface="Arial" pitchFamily="34" charset="-120"/>
+              </a:rPr>
+              <a:t>kind and specific</a:t>
+            </a:r>
+            <a:pPr algn="l" indent="0" marL="0">
+              <a:lnSpc>
+                <a:spcPts val="1620"/>
+              </a:lnSpc>
+              <a:spcAft>
+                <a:spcPts val="300"/>
+              </a:spcAft>
+              <a:buNone/>
+            </a:pPr>
+            <a:r>
+              <a:rPr lang="en-US" sz="1200" dirty="0">
+                <a:solidFill>
+                  <a:srgbClr val="1C2833"/>
+                </a:solidFill>
+                <a:latin typeface="Arial" pitchFamily="34" charset="0"/>
+                <a:ea typeface="Arial" pitchFamily="34" charset="-122"/>
+                <a:cs typeface="Arial" pitchFamily="34" charset="-120"/>
+              </a:rPr>
+              <a:t> feedback.</a:t>
+            </a:r>
+            <a:endParaRPr lang="en-US" sz="1200" dirty="0"/>
+          </a:p>
+        </p:txBody>
+      </p:sp>
+      <p:sp>
+        <p:nvSpPr>
+          <p:cNvPr id="5" name="Text 3"/>
           <p:cNvSpPr/>
           <p:nvPr/>
         </p:nvSpPr>
@@ -2027,7 +2621,7 @@
                 <a:ea typeface="Georgia" pitchFamily="34" charset="-122"/>
                 <a:cs typeface="Georgia" pitchFamily="34" charset="-120"/>
               </a:rPr>
-              <a:t>Materials</a:t>
+              <a:t>Learning objective</a:t>
             </a:r>
             <a:endParaRPr lang="en-US" sz="1800" dirty="0"/>
           </a:p>
@@ -2075,7 +2669,7 @@
                 <a:ea typeface="Arial" pitchFamily="34" charset="-122"/>
                 <a:cs typeface="Arial" pitchFamily="34" charset="-120"/>
               </a:rPr>
-              <a:t>– All in-progress materials – Stopwatch</a:t>
+              <a:t>Each student rehearses their 5-min presentation end-to-end with timed feedback from a buddy.</a:t>
             </a:r>
             <a:endParaRPr lang="en-US" sz="1200" dirty="0"/>
           </a:p>
@@ -2233,7 +2827,7 @@
                 <a:ea typeface="Georgia" pitchFamily="34" charset="-122"/>
                 <a:cs typeface="Georgia" pitchFamily="34" charset="-120"/>
               </a:rPr>
-              <a:t>Flow</a:t>
+              <a:t>Materials</a:t>
             </a:r>
             <a:endParaRPr lang="en-US" sz="1800" dirty="0"/>
           </a:p>
@@ -2242,6 +2836,76 @@
       <p:sp>
         <p:nvSpPr>
           <p:cNvPr id="4" name="Text 2"/>
+          <p:cNvSpPr/>
+          <p:nvPr/>
+        </p:nvSpPr>
+        <p:spPr>
+          <a:xfrm>
+            <a:off x="634901" y="883593"/>
+            <a:ext cx="8102798" cy="525661"/>
+          </a:xfrm>
+          <a:prstGeom prst="rect">
+            <a:avLst/>
+          </a:prstGeom>
+          <a:noFill/>
+          <a:ln/>
+        </p:spPr>
+        <p:txBody>
+          <a:bodyPr wrap="square" lIns="0" tIns="0" rIns="0" bIns="0" rtlCol="0" anchor="t"/>
+          <a:lstStyle/>
+          <a:p>
+            <a:pPr algn="l" marL="342900" indent="-342900">
+              <a:lnSpc>
+                <a:spcPts val="1620"/>
+              </a:lnSpc>
+              <a:spcAft>
+                <a:spcPts val="300"/>
+              </a:spcAft>
+              <a:buSzPct val="100000"/>
+              <a:buChar char="•"/>
+            </a:pPr>
+            <a:r>
+              <a:rPr lang="en-US" sz="1200" dirty="0">
+                <a:solidFill>
+                  <a:srgbClr val="1C2833"/>
+                </a:solidFill>
+                <a:latin typeface="Arial" pitchFamily="34" charset="0"/>
+                <a:ea typeface="Arial" pitchFamily="34" charset="-122"/>
+                <a:cs typeface="Arial" pitchFamily="34" charset="-120"/>
+              </a:rPr>
+              <a:t>All in-progress materials</a:t>
+            </a:r>
+            <a:endParaRPr lang="en-US" sz="1200" dirty="0"/>
+          </a:p>
+          <a:p>
+            <a:pPr algn="l" marL="342900" indent="-342900">
+              <a:lnSpc>
+                <a:spcPts val="1620"/>
+              </a:lnSpc>
+              <a:spcAft>
+                <a:spcPts val="300"/>
+              </a:spcAft>
+              <a:buSzPct val="100000"/>
+              <a:buChar char="•"/>
+            </a:pPr>
+            <a:r>
+              <a:rPr lang="en-US" sz="1200" dirty="0">
+                <a:solidFill>
+                  <a:srgbClr val="1C2833"/>
+                </a:solidFill>
+                <a:latin typeface="Arial" pitchFamily="34" charset="0"/>
+                <a:ea typeface="Arial" pitchFamily="34" charset="-122"/>
+                <a:cs typeface="Arial" pitchFamily="34" charset="-120"/>
+              </a:rPr>
+              <a:t>Stopwatch</a:t>
+            </a:r>
+            <a:endParaRPr lang="en-US" sz="1200" dirty="0"/>
+          </a:p>
+        </p:txBody>
+      </p:sp>
+      <p:sp>
+        <p:nvSpPr>
+          <p:cNvPr id="5" name="Text 3"/>
           <p:cNvSpPr/>
           <p:nvPr/>
         </p:nvSpPr>
@@ -2391,7 +3055,7 @@
                 <a:ea typeface="Georgia" pitchFamily="34" charset="-122"/>
                 <a:cs typeface="Georgia" pitchFamily="34" charset="-120"/>
               </a:rPr>
-              <a:t>Warm-up (3 min)</a:t>
+              <a:t>Flow</a:t>
             </a:r>
             <a:endParaRPr lang="en-US" sz="1800" dirty="0"/>
           </a:p>
@@ -2400,54 +3064,6 @@
       <p:sp>
         <p:nvSpPr>
           <p:cNvPr id="4" name="Text 2"/>
-          <p:cNvSpPr/>
-          <p:nvPr/>
-        </p:nvSpPr>
-        <p:spPr>
-          <a:xfrm>
-            <a:off x="406301" y="870942"/>
-            <a:ext cx="8498026" cy="213271"/>
-          </a:xfrm>
-          <a:prstGeom prst="rect">
-            <a:avLst/>
-          </a:prstGeom>
-          <a:noFill/>
-          <a:ln/>
-        </p:spPr>
-        <p:txBody>
-          <a:bodyPr wrap="square" lIns="0" tIns="0" rIns="0" bIns="0" rtlCol="0" anchor="t"/>
-          <a:lstStyle/>
-          <a:p>
-            <a:pPr algn="l" indent="0" marL="0">
-              <a:lnSpc>
-                <a:spcPts val="1680"/>
-              </a:lnSpc>
-              <a:spcBef>
-                <a:spcPts val="300"/>
-              </a:spcBef>
-              <a:spcAft>
-                <a:spcPts val="300"/>
-              </a:spcAft>
-              <a:buNone/>
-            </a:pPr>
-            <a:r>
-              <a:rPr lang="en-US" sz="1200" dirty="0">
-                <a:solidFill>
-                  <a:srgbClr val="1C2833"/>
-                </a:solidFill>
-                <a:latin typeface="Arial" pitchFamily="34" charset="0"/>
-                <a:ea typeface="Arial" pitchFamily="34" charset="-122"/>
-                <a:cs typeface="Arial" pitchFamily="34" charset="-120"/>
-              </a:rPr>
-              <a:t>Brief: today is refine + rehearse.</a:t>
-            </a:r>
-            <a:endParaRPr lang="en-US" sz="1200" dirty="0"/>
-          </a:p>
-        </p:txBody>
-      </p:sp>
-      <p:sp>
-        <p:nvSpPr>
-          <p:cNvPr id="5" name="Text 3"/>
           <p:cNvSpPr/>
           <p:nvPr/>
         </p:nvSpPr>
@@ -2597,7 +3213,7 @@
                 <a:ea typeface="Georgia" pitchFamily="34" charset="-122"/>
                 <a:cs typeface="Georgia" pitchFamily="34" charset="-120"/>
               </a:rPr>
-              <a:t>Sprints (35 min)</a:t>
+              <a:t>Warm-up (3 min)</a:t>
             </a:r>
             <a:endParaRPr lang="en-US" sz="1800" dirty="0"/>
           </a:p>
@@ -2637,7 +3253,7 @@
               <a:buNone/>
             </a:pPr>
             <a:r>
-              <a:rPr lang="en-US" sz="1200" b="1" dirty="0">
+              <a:rPr lang="en-US" sz="1200" dirty="0">
                 <a:solidFill>
                   <a:srgbClr val="1C2833"/>
                 </a:solidFill>
@@ -2645,53 +3261,7 @@
                 <a:ea typeface="Arial" pitchFamily="34" charset="-122"/>
                 <a:cs typeface="Arial" pitchFamily="34" charset="-120"/>
               </a:rPr>
-              <a:t>Sprint 1 (15 min) — Refine.</a:t>
-            </a:r>
-            <a:pPr algn="l" indent="0" marL="0">
-              <a:lnSpc>
-                <a:spcPts val="1680"/>
-              </a:lnSpc>
-              <a:spcBef>
-                <a:spcPts val="300"/>
-              </a:spcBef>
-              <a:spcAft>
-                <a:spcPts val="300"/>
-              </a:spcAft>
-              <a:buNone/>
-            </a:pPr>
-            <a:r>
-              <a:rPr lang="en-US" sz="1200" dirty="0">
-                <a:solidFill>
-                  <a:srgbClr val="1C2833"/>
-                </a:solidFill>
-                <a:latin typeface="Arial" pitchFamily="34" charset="0"/>
-                <a:ea typeface="Arial" pitchFamily="34" charset="-122"/>
-                <a:cs typeface="Arial" pitchFamily="34" charset="-120"/>
-              </a:rPr>
-              <a:t> Teacher rotates with focused question: </a:t>
-            </a:r>
-            <a:pPr algn="l" indent="0" marL="0">
-              <a:lnSpc>
-                <a:spcPts val="1680"/>
-              </a:lnSpc>
-              <a:spcBef>
-                <a:spcPts val="300"/>
-              </a:spcBef>
-              <a:spcAft>
-                <a:spcPts val="300"/>
-              </a:spcAft>
-              <a:buNone/>
-            </a:pPr>
-            <a:r>
-              <a:rPr lang="en-US" sz="1200" i="1" dirty="0">
-                <a:solidFill>
-                  <a:srgbClr val="1C2833"/>
-                </a:solidFill>
-                <a:latin typeface="Arial" pitchFamily="34" charset="0"/>
-                <a:ea typeface="Arial" pitchFamily="34" charset="-122"/>
-                <a:cs typeface="Arial" pitchFamily="34" charset="-120"/>
-              </a:rPr>
-              <a:t>"Show me your strongest 60 seconds."</a:t>
+              <a:t>Brief: today is refine + rehearse.</a:t>
             </a:r>
             <a:endParaRPr lang="en-US" sz="1200" dirty="0"/>
           </a:p>
@@ -2700,196 +3270,6 @@
       <p:sp>
         <p:nvSpPr>
           <p:cNvPr id="5" name="Text 3"/>
-          <p:cNvSpPr/>
-          <p:nvPr/>
-        </p:nvSpPr>
-        <p:spPr>
-          <a:xfrm>
-            <a:off x="406301" y="1160413"/>
-            <a:ext cx="8498026" cy="426541"/>
-          </a:xfrm>
-          <a:prstGeom prst="rect">
-            <a:avLst/>
-          </a:prstGeom>
-          <a:noFill/>
-          <a:ln/>
-        </p:spPr>
-        <p:txBody>
-          <a:bodyPr wrap="square" lIns="0" tIns="0" rIns="0" bIns="0" rtlCol="0" anchor="t"/>
-          <a:lstStyle/>
-          <a:p>
-            <a:pPr algn="l" indent="0" marL="0">
-              <a:lnSpc>
-                <a:spcPts val="1680"/>
-              </a:lnSpc>
-              <a:spcBef>
-                <a:spcPts val="300"/>
-              </a:spcBef>
-              <a:spcAft>
-                <a:spcPts val="300"/>
-              </a:spcAft>
-              <a:buNone/>
-            </a:pPr>
-            <a:r>
-              <a:rPr lang="en-US" sz="1200" dirty="0">
-                <a:solidFill>
-                  <a:srgbClr val="1C2833"/>
-                </a:solidFill>
-                <a:latin typeface="Arial" pitchFamily="34" charset="0"/>
-                <a:ea typeface="Arial" pitchFamily="34" charset="-122"/>
-                <a:cs typeface="Arial" pitchFamily="34" charset="-120"/>
-              </a:rPr>
-              <a:t>Common interventions: – Missing the "honest limitation" — must include. – Source cited but not actually engaged — push for a quote or paraphrase. – Specific claim vague — sharpen.</a:t>
-            </a:r>
-            <a:endParaRPr lang="en-US" sz="1200" dirty="0"/>
-          </a:p>
-        </p:txBody>
-      </p:sp>
-      <p:sp>
-        <p:nvSpPr>
-          <p:cNvPr id="6" name="Text 4"/>
-          <p:cNvSpPr/>
-          <p:nvPr/>
-        </p:nvSpPr>
-        <p:spPr>
-          <a:xfrm>
-            <a:off x="406301" y="1663154"/>
-            <a:ext cx="8498026" cy="213271"/>
-          </a:xfrm>
-          <a:prstGeom prst="rect">
-            <a:avLst/>
-          </a:prstGeom>
-          <a:noFill/>
-          <a:ln/>
-        </p:spPr>
-        <p:txBody>
-          <a:bodyPr wrap="square" lIns="0" tIns="0" rIns="0" bIns="0" rtlCol="0" anchor="t"/>
-          <a:lstStyle/>
-          <a:p>
-            <a:pPr algn="l" indent="0" marL="0">
-              <a:lnSpc>
-                <a:spcPts val="1680"/>
-              </a:lnSpc>
-              <a:spcBef>
-                <a:spcPts val="300"/>
-              </a:spcBef>
-              <a:spcAft>
-                <a:spcPts val="300"/>
-              </a:spcAft>
-              <a:buNone/>
-            </a:pPr>
-            <a:r>
-              <a:rPr lang="en-US" sz="1200" b="1" dirty="0">
-                <a:solidFill>
-                  <a:srgbClr val="1C2833"/>
-                </a:solidFill>
-                <a:latin typeface="Arial" pitchFamily="34" charset="0"/>
-                <a:ea typeface="Arial" pitchFamily="34" charset="-122"/>
-                <a:cs typeface="Arial" pitchFamily="34" charset="-120"/>
-              </a:rPr>
-              <a:t>Sprint 2 (15 min) — Buddy rehearsal.</a:t>
-            </a:r>
-            <a:pPr algn="l" indent="0" marL="0">
-              <a:lnSpc>
-                <a:spcPts val="1680"/>
-              </a:lnSpc>
-              <a:spcBef>
-                <a:spcPts val="300"/>
-              </a:spcBef>
-              <a:spcAft>
-                <a:spcPts val="300"/>
-              </a:spcAft>
-              <a:buNone/>
-            </a:pPr>
-            <a:r>
-              <a:rPr lang="en-US" sz="1200" dirty="0">
-                <a:solidFill>
-                  <a:srgbClr val="1C2833"/>
-                </a:solidFill>
-                <a:latin typeface="Arial" pitchFamily="34" charset="0"/>
-                <a:ea typeface="Arial" pitchFamily="34" charset="-122"/>
-                <a:cs typeface="Arial" pitchFamily="34" charset="-120"/>
-              </a:rPr>
-              <a:t> Pairs rehearse to each other. 5 min talk + 2 min feedback. Swap.</a:t>
-            </a:r>
-            <a:endParaRPr lang="en-US" sz="1200" dirty="0"/>
-          </a:p>
-        </p:txBody>
-      </p:sp>
-      <p:sp>
-        <p:nvSpPr>
-          <p:cNvPr id="7" name="Text 5"/>
-          <p:cNvSpPr/>
-          <p:nvPr/>
-        </p:nvSpPr>
-        <p:spPr>
-          <a:xfrm>
-            <a:off x="406301" y="1952625"/>
-            <a:ext cx="8498026" cy="213271"/>
-          </a:xfrm>
-          <a:prstGeom prst="rect">
-            <a:avLst/>
-          </a:prstGeom>
-          <a:noFill/>
-          <a:ln/>
-        </p:spPr>
-        <p:txBody>
-          <a:bodyPr wrap="square" lIns="0" tIns="0" rIns="0" bIns="0" rtlCol="0" anchor="t"/>
-          <a:lstStyle/>
-          <a:p>
-            <a:pPr algn="l" indent="0" marL="0">
-              <a:lnSpc>
-                <a:spcPts val="1680"/>
-              </a:lnSpc>
-              <a:spcBef>
-                <a:spcPts val="300"/>
-              </a:spcBef>
-              <a:spcAft>
-                <a:spcPts val="300"/>
-              </a:spcAft>
-              <a:buNone/>
-            </a:pPr>
-            <a:r>
-              <a:rPr lang="en-US" sz="1200" b="1" dirty="0">
-                <a:solidFill>
-                  <a:srgbClr val="1C2833"/>
-                </a:solidFill>
-                <a:latin typeface="Arial" pitchFamily="34" charset="0"/>
-                <a:ea typeface="Arial" pitchFamily="34" charset="-122"/>
-                <a:cs typeface="Arial" pitchFamily="34" charset="-120"/>
-              </a:rPr>
-              <a:t>Sprint 3 (5 min) — Adjust.</a:t>
-            </a:r>
-            <a:pPr algn="l" indent="0" marL="0">
-              <a:lnSpc>
-                <a:spcPts val="1680"/>
-              </a:lnSpc>
-              <a:spcBef>
-                <a:spcPts val="300"/>
-              </a:spcBef>
-              <a:spcAft>
-                <a:spcPts val="300"/>
-              </a:spcAft>
-              <a:buNone/>
-            </a:pPr>
-            <a:r>
-              <a:rPr lang="en-US" sz="1200" dirty="0">
-                <a:solidFill>
-                  <a:srgbClr val="1C2833"/>
-                </a:solidFill>
-                <a:latin typeface="Arial" pitchFamily="34" charset="0"/>
-                <a:ea typeface="Arial" pitchFamily="34" charset="-122"/>
-                <a:cs typeface="Arial" pitchFamily="34" charset="-120"/>
-              </a:rPr>
-              <a:t> Each student decides one change.</a:t>
-            </a:r>
-            <a:endParaRPr lang="en-US" sz="1200" dirty="0"/>
-          </a:p>
-        </p:txBody>
-      </p:sp>
-      <p:sp>
-        <p:nvSpPr>
-          <p:cNvPr id="8" name="Text 6"/>
           <p:cNvSpPr/>
           <p:nvPr/>
         </p:nvSpPr>
@@ -3039,7 +3419,7 @@
                 <a:ea typeface="Georgia" pitchFamily="34" charset="-122"/>
                 <a:cs typeface="Georgia" pitchFamily="34" charset="-120"/>
               </a:rPr>
-              <a:t>Wrap-up (7 min)</a:t>
+              <a:t>Sprints (35 min)</a:t>
             </a:r>
             <a:endParaRPr lang="en-US" sz="1800" dirty="0"/>
           </a:p>
@@ -3079,7 +3459,7 @@
               <a:buNone/>
             </a:pPr>
             <a:r>
-              <a:rPr lang="en-US" sz="1200" dirty="0">
+              <a:rPr lang="en-US" sz="1200" b="1" dirty="0">
                 <a:solidFill>
                   <a:srgbClr val="1C2833"/>
                 </a:solidFill>
@@ -3087,7 +3467,53 @@
                 <a:ea typeface="Arial" pitchFamily="34" charset="-122"/>
                 <a:cs typeface="Arial" pitchFamily="34" charset="-120"/>
               </a:rPr>
-              <a:t>– 3 students share what they're changing. – Final touches at home tonight.</a:t>
+              <a:t>Sprint 1 (15 min) — Refine.</a:t>
+            </a:r>
+            <a:pPr algn="l" indent="0" marL="0">
+              <a:lnSpc>
+                <a:spcPts val="1680"/>
+              </a:lnSpc>
+              <a:spcBef>
+                <a:spcPts val="300"/>
+              </a:spcBef>
+              <a:spcAft>
+                <a:spcPts val="300"/>
+              </a:spcAft>
+              <a:buNone/>
+            </a:pPr>
+            <a:r>
+              <a:rPr lang="en-US" sz="1200" dirty="0">
+                <a:solidFill>
+                  <a:srgbClr val="1C2833"/>
+                </a:solidFill>
+                <a:latin typeface="Arial" pitchFamily="34" charset="0"/>
+                <a:ea typeface="Arial" pitchFamily="34" charset="-122"/>
+                <a:cs typeface="Arial" pitchFamily="34" charset="-120"/>
+              </a:rPr>
+              <a:t> Teacher rotates with focused question: </a:t>
+            </a:r>
+            <a:pPr algn="l" indent="0" marL="0">
+              <a:lnSpc>
+                <a:spcPts val="1680"/>
+              </a:lnSpc>
+              <a:spcBef>
+                <a:spcPts val="300"/>
+              </a:spcBef>
+              <a:spcAft>
+                <a:spcPts val="300"/>
+              </a:spcAft>
+              <a:buNone/>
+            </a:pPr>
+            <a:r>
+              <a:rPr lang="en-US" sz="1200" i="1" dirty="0">
+                <a:solidFill>
+                  <a:srgbClr val="1C2833"/>
+                </a:solidFill>
+                <a:latin typeface="Arial" pitchFamily="34" charset="0"/>
+                <a:ea typeface="Arial" pitchFamily="34" charset="-122"/>
+                <a:cs typeface="Arial" pitchFamily="34" charset="-120"/>
+              </a:rPr>
+              <a:t>"Show me your strongest 60 seconds."</a:t>
             </a:r>
             <a:endParaRPr lang="en-US" sz="1200" dirty="0"/>
           </a:p>
@@ -3096,6 +3522,148 @@
       <p:sp>
         <p:nvSpPr>
           <p:cNvPr id="5" name="Text 3"/>
+          <p:cNvSpPr/>
+          <p:nvPr/>
+        </p:nvSpPr>
+        <p:spPr>
+          <a:xfrm>
+            <a:off x="406301" y="1160413"/>
+            <a:ext cx="8498026" cy="213271"/>
+          </a:xfrm>
+          <a:prstGeom prst="rect">
+            <a:avLst/>
+          </a:prstGeom>
+          <a:noFill/>
+          <a:ln/>
+        </p:spPr>
+        <p:txBody>
+          <a:bodyPr wrap="square" lIns="0" tIns="0" rIns="0" bIns="0" rtlCol="0" anchor="t"/>
+          <a:lstStyle/>
+          <a:p>
+            <a:pPr algn="l" indent="0" marL="0">
+              <a:lnSpc>
+                <a:spcPts val="1680"/>
+              </a:lnSpc>
+              <a:spcBef>
+                <a:spcPts val="300"/>
+              </a:spcBef>
+              <a:spcAft>
+                <a:spcPts val="300"/>
+              </a:spcAft>
+              <a:buNone/>
+            </a:pPr>
+            <a:r>
+              <a:rPr lang="en-US" sz="1200" dirty="0">
+                <a:solidFill>
+                  <a:srgbClr val="1C2833"/>
+                </a:solidFill>
+                <a:latin typeface="Arial" pitchFamily="34" charset="0"/>
+                <a:ea typeface="Arial" pitchFamily="34" charset="-122"/>
+                <a:cs typeface="Arial" pitchFamily="34" charset="-120"/>
+              </a:rPr>
+              <a:t>Common interventions:</a:t>
+            </a:r>
+            <a:endParaRPr lang="en-US" sz="1200" dirty="0"/>
+          </a:p>
+        </p:txBody>
+      </p:sp>
+      <p:sp>
+        <p:nvSpPr>
+          <p:cNvPr id="6" name="Text 4"/>
+          <p:cNvSpPr/>
+          <p:nvPr/>
+        </p:nvSpPr>
+        <p:spPr>
+          <a:xfrm>
+            <a:off x="634901" y="1462534"/>
+            <a:ext cx="8102798" cy="769441"/>
+          </a:xfrm>
+          <a:prstGeom prst="rect">
+            <a:avLst/>
+          </a:prstGeom>
+          <a:noFill/>
+          <a:ln/>
+        </p:spPr>
+        <p:txBody>
+          <a:bodyPr wrap="square" lIns="0" tIns="0" rIns="0" bIns="0" rtlCol="0" anchor="t"/>
+          <a:lstStyle/>
+          <a:p>
+            <a:pPr algn="l" marL="342900" indent="-342900">
+              <a:lnSpc>
+                <a:spcPts val="1620"/>
+              </a:lnSpc>
+              <a:spcAft>
+                <a:spcPts val="300"/>
+              </a:spcAft>
+              <a:buSzPct val="100000"/>
+              <a:buChar char="•"/>
+            </a:pPr>
+            <a:r>
+              <a:rPr lang="en-US" sz="1200" dirty="0">
+                <a:solidFill>
+                  <a:srgbClr val="1C2833"/>
+                </a:solidFill>
+                <a:latin typeface="Arial" pitchFamily="34" charset="0"/>
+                <a:ea typeface="Arial" pitchFamily="34" charset="-122"/>
+                <a:cs typeface="Arial" pitchFamily="34" charset="-120"/>
+              </a:rPr>
+              <a:t>Missing the "honest limitation" — must include.</a:t>
+            </a:r>
+            <a:endParaRPr lang="en-US" sz="1200" dirty="0"/>
+          </a:p>
+          <a:p>
+            <a:pPr algn="l" marL="342900" indent="-342900">
+              <a:lnSpc>
+                <a:spcPts val="1620"/>
+              </a:lnSpc>
+              <a:spcAft>
+                <a:spcPts val="300"/>
+              </a:spcAft>
+              <a:buSzPct val="100000"/>
+              <a:buChar char="•"/>
+            </a:pPr>
+            <a:r>
+              <a:rPr lang="en-US" sz="1200" dirty="0">
+                <a:solidFill>
+                  <a:srgbClr val="1C2833"/>
+                </a:solidFill>
+                <a:latin typeface="Arial" pitchFamily="34" charset="0"/>
+                <a:ea typeface="Arial" pitchFamily="34" charset="-122"/>
+                <a:cs typeface="Arial" pitchFamily="34" charset="-120"/>
+              </a:rPr>
+              <a:t>Source cited but not actually engaged — push for a quote or paraphrase.</a:t>
+            </a:r>
+            <a:endParaRPr lang="en-US" sz="1200" dirty="0"/>
+          </a:p>
+          <a:p>
+            <a:pPr algn="l" marL="342900" indent="-342900">
+              <a:lnSpc>
+                <a:spcPts val="1620"/>
+              </a:lnSpc>
+              <a:spcAft>
+                <a:spcPts val="300"/>
+              </a:spcAft>
+              <a:buSzPct val="100000"/>
+              <a:buChar char="•"/>
+            </a:pPr>
+            <a:r>
+              <a:rPr lang="en-US" sz="1200" dirty="0">
+                <a:solidFill>
+                  <a:srgbClr val="1C2833"/>
+                </a:solidFill>
+                <a:latin typeface="Arial" pitchFamily="34" charset="0"/>
+                <a:ea typeface="Arial" pitchFamily="34" charset="-122"/>
+                <a:cs typeface="Arial" pitchFamily="34" charset="-120"/>
+              </a:rPr>
+              <a:t>Specific claim vague — sharpen.</a:t>
+            </a:r>
+            <a:endParaRPr lang="en-US" sz="1200" dirty="0"/>
+          </a:p>
+        </p:txBody>
+      </p:sp>
+      <p:sp>
+        <p:nvSpPr>
+          <p:cNvPr id="7" name="Text 5"/>
           <p:cNvSpPr/>
           <p:nvPr/>
         </p:nvSpPr>
@@ -3245,7 +3813,7 @@
                 <a:ea typeface="Georgia" pitchFamily="34" charset="-122"/>
                 <a:cs typeface="Georgia" pitchFamily="34" charset="-120"/>
               </a:rPr>
-              <a:t>Homework</a:t>
+              <a:t>Sprints (35 min) (cont.)</a:t>
             </a:r>
             <a:endParaRPr lang="en-US" sz="1800" dirty="0"/>
           </a:p>
@@ -3285,7 +3853,7 @@
               <a:buNone/>
             </a:pPr>
             <a:r>
-              <a:rPr lang="en-US" sz="1200" dirty="0">
+              <a:rPr lang="en-US" sz="1200" b="1" dirty="0">
                 <a:solidFill>
                   <a:srgbClr val="1C2833"/>
                 </a:solidFill>
@@ -3293,7 +3861,30 @@
                 <a:ea typeface="Arial" pitchFamily="34" charset="-122"/>
                 <a:cs typeface="Arial" pitchFamily="34" charset="-120"/>
               </a:rPr>
-              <a:t>– Finalise. Bring everything tomorrow.</a:t>
+              <a:t>Sprint 2 (15 min) — Buddy rehearsal.</a:t>
+            </a:r>
+            <a:pPr algn="l" indent="0" marL="0">
+              <a:lnSpc>
+                <a:spcPts val="1680"/>
+              </a:lnSpc>
+              <a:spcBef>
+                <a:spcPts val="300"/>
+              </a:spcBef>
+              <a:spcAft>
+                <a:spcPts val="300"/>
+              </a:spcAft>
+              <a:buNone/>
+            </a:pPr>
+            <a:r>
+              <a:rPr lang="en-US" sz="1200" dirty="0">
+                <a:solidFill>
+                  <a:srgbClr val="1C2833"/>
+                </a:solidFill>
+                <a:latin typeface="Arial" pitchFamily="34" charset="0"/>
+                <a:ea typeface="Arial" pitchFamily="34" charset="-122"/>
+                <a:cs typeface="Arial" pitchFamily="34" charset="-120"/>
+              </a:rPr>
+              <a:t> Pairs rehearse to each other. 5 min talk + 2 min feedback. Swap.</a:t>
             </a:r>
             <a:endParaRPr lang="en-US" sz="1200" dirty="0"/>
           </a:p>
@@ -3302,6 +3893,77 @@
       <p:sp>
         <p:nvSpPr>
           <p:cNvPr id="5" name="Text 3"/>
+          <p:cNvSpPr/>
+          <p:nvPr/>
+        </p:nvSpPr>
+        <p:spPr>
+          <a:xfrm>
+            <a:off x="406301" y="1160413"/>
+            <a:ext cx="8498026" cy="213271"/>
+          </a:xfrm>
+          <a:prstGeom prst="rect">
+            <a:avLst/>
+          </a:prstGeom>
+          <a:noFill/>
+          <a:ln/>
+        </p:spPr>
+        <p:txBody>
+          <a:bodyPr wrap="square" lIns="0" tIns="0" rIns="0" bIns="0" rtlCol="0" anchor="t"/>
+          <a:lstStyle/>
+          <a:p>
+            <a:pPr algn="l" indent="0" marL="0">
+              <a:lnSpc>
+                <a:spcPts val="1680"/>
+              </a:lnSpc>
+              <a:spcBef>
+                <a:spcPts val="300"/>
+              </a:spcBef>
+              <a:spcAft>
+                <a:spcPts val="300"/>
+              </a:spcAft>
+              <a:buNone/>
+            </a:pPr>
+            <a:r>
+              <a:rPr lang="en-US" sz="1200" b="1" dirty="0">
+                <a:solidFill>
+                  <a:srgbClr val="1C2833"/>
+                </a:solidFill>
+                <a:latin typeface="Arial" pitchFamily="34" charset="0"/>
+                <a:ea typeface="Arial" pitchFamily="34" charset="-122"/>
+                <a:cs typeface="Arial" pitchFamily="34" charset="-120"/>
+              </a:rPr>
+              <a:t>Sprint 3 (5 min) — Adjust.</a:t>
+            </a:r>
+            <a:pPr algn="l" indent="0" marL="0">
+              <a:lnSpc>
+                <a:spcPts val="1680"/>
+              </a:lnSpc>
+              <a:spcBef>
+                <a:spcPts val="300"/>
+              </a:spcBef>
+              <a:spcAft>
+                <a:spcPts val="300"/>
+              </a:spcAft>
+              <a:buNone/>
+            </a:pPr>
+            <a:r>
+              <a:rPr lang="en-US" sz="1200" dirty="0">
+                <a:solidFill>
+                  <a:srgbClr val="1C2833"/>
+                </a:solidFill>
+                <a:latin typeface="Arial" pitchFamily="34" charset="0"/>
+                <a:ea typeface="Arial" pitchFamily="34" charset="-122"/>
+                <a:cs typeface="Arial" pitchFamily="34" charset="-120"/>
+              </a:rPr>
+              <a:t> Each student decides one change.</a:t>
+            </a:r>
+            <a:endParaRPr lang="en-US" sz="1200" dirty="0"/>
+          </a:p>
+        </p:txBody>
+      </p:sp>
+      <p:sp>
+        <p:nvSpPr>
+          <p:cNvPr id="6" name="Text 4"/>
           <p:cNvSpPr/>
           <p:nvPr/>
         </p:nvSpPr>
@@ -3451,7 +4113,7 @@
                 <a:ea typeface="Georgia" pitchFamily="34" charset="-122"/>
                 <a:cs typeface="Georgia" pitchFamily="34" charset="-120"/>
               </a:rPr>
-              <a:t>Differentiation</a:t>
+              <a:t>Wrap-up (7 min)</a:t>
             </a:r>
             <a:endParaRPr lang="en-US" sz="1800" dirty="0"/>
           </a:p>
@@ -3489,7 +4151,7 @@
               <a:buChar char="•"/>
             </a:pPr>
             <a:r>
-              <a:rPr lang="en-US" sz="1200" b="1" dirty="0">
+              <a:rPr lang="en-US" sz="1200" dirty="0">
                 <a:solidFill>
                   <a:srgbClr val="1C2833"/>
                 </a:solidFill>
@@ -3497,16 +4159,20 @@
                 <a:ea typeface="Arial" pitchFamily="34" charset="-122"/>
                 <a:cs typeface="Arial" pitchFamily="34" charset="-120"/>
               </a:rPr>
-              <a:t>Tier up:</a:t>
-            </a:r>
-            <a:pPr algn="l" indent="0" marL="0">
+              <a:t>3 students share what they're changing.</a:t>
+            </a:r>
+            <a:endParaRPr lang="en-US" sz="1200" dirty="0"/>
+          </a:p>
+          <a:p>
+            <a:pPr algn="l" marL="342900" indent="-342900">
               <a:lnSpc>
                 <a:spcPts val="1620"/>
               </a:lnSpc>
               <a:spcAft>
                 <a:spcPts val="300"/>
               </a:spcAft>
-              <a:buNone/>
+              <a:buSzPct val="100000"/>
+              <a:buChar char="•"/>
             </a:pPr>
             <a:r>
               <a:rPr lang="en-US" sz="1200" dirty="0">
@@ -3517,51 +4183,7 @@
                 <a:ea typeface="Arial" pitchFamily="34" charset="-122"/>
                 <a:cs typeface="Arial" pitchFamily="34" charset="-120"/>
               </a:rPr>
-              <a:t> Anticipate the toughest audience question and prepare a 30-sec answer.</a:t>
-            </a:r>
-            <a:endParaRPr lang="en-US" sz="1200" dirty="0"/>
-          </a:p>
-          <a:p>
-            <a:pPr algn="l" marL="342900" indent="-342900">
-              <a:lnSpc>
-                <a:spcPts val="1620"/>
-              </a:lnSpc>
-              <a:spcAft>
-                <a:spcPts val="300"/>
-              </a:spcAft>
-              <a:buSzPct val="100000"/>
-              <a:buChar char="•"/>
-            </a:pPr>
-            <a:r>
-              <a:rPr lang="en-US" sz="1200" b="1" dirty="0">
-                <a:solidFill>
-                  <a:srgbClr val="1C2833"/>
-                </a:solidFill>
-                <a:latin typeface="Arial" pitchFamily="34" charset="0"/>
-                <a:ea typeface="Arial" pitchFamily="34" charset="-122"/>
-                <a:cs typeface="Arial" pitchFamily="34" charset="-120"/>
-              </a:rPr>
-              <a:t>Tier down:</a:t>
-            </a:r>
-            <a:pPr algn="l" indent="0" marL="0">
-              <a:lnSpc>
-                <a:spcPts val="1620"/>
-              </a:lnSpc>
-              <a:spcAft>
-                <a:spcPts val="300"/>
-              </a:spcAft>
-              <a:buNone/>
-            </a:pPr>
-            <a:r>
-              <a:rPr lang="en-US" sz="1200" dirty="0">
-                <a:solidFill>
-                  <a:srgbClr val="1C2833"/>
-                </a:solidFill>
-                <a:latin typeface="Arial" pitchFamily="34" charset="0"/>
-                <a:ea typeface="Arial" pitchFamily="34" charset="-122"/>
-                <a:cs typeface="Arial" pitchFamily="34" charset="-120"/>
-              </a:rPr>
-              <a:t> Read from notes during presentation if needed.</a:t>
+              <a:t>Final touches at home tonight.</a:t>
             </a:r>
             <a:endParaRPr lang="en-US" sz="1200" dirty="0"/>
           </a:p>
@@ -3719,7 +4341,7 @@
                 <a:ea typeface="Georgia" pitchFamily="34" charset="-122"/>
                 <a:cs typeface="Georgia" pitchFamily="34" charset="-120"/>
               </a:rPr>
-              <a:t>Teacher notes</a:t>
+              <a:t>Homework</a:t>
             </a:r>
             <a:endParaRPr lang="en-US" sz="1800" dirty="0"/>
           </a:p>
@@ -3733,8 +4355,8 @@
         </p:nvSpPr>
         <p:spPr>
           <a:xfrm>
-            <a:off x="406301" y="870942"/>
-            <a:ext cx="8498026" cy="213271"/>
+            <a:off x="634901" y="883593"/>
+            <a:ext cx="8102798" cy="281880"/>
           </a:xfrm>
           <a:prstGeom prst="rect">
             <a:avLst/>
@@ -3746,17 +4368,15 @@
           <a:bodyPr wrap="square" lIns="0" tIns="0" rIns="0" bIns="0" rtlCol="0" anchor="t"/>
           <a:lstStyle/>
           <a:p>
-            <a:pPr algn="l" indent="0" marL="0">
-              <a:lnSpc>
-                <a:spcPts val="1680"/>
-              </a:lnSpc>
-              <a:spcBef>
-                <a:spcPts val="300"/>
-              </a:spcBef>
-              <a:spcAft>
-                <a:spcPts val="300"/>
-              </a:spcAft>
-              <a:buNone/>
+            <a:pPr algn="l" marL="342900" indent="-342900">
+              <a:lnSpc>
+                <a:spcPts val="1620"/>
+              </a:lnSpc>
+              <a:spcAft>
+                <a:spcPts val="300"/>
+              </a:spcAft>
+              <a:buSzPct val="100000"/>
+              <a:buChar char="•"/>
             </a:pPr>
             <a:r>
               <a:rPr lang="en-US" sz="1200" dirty="0">
@@ -3767,53 +4387,7 @@
                 <a:ea typeface="Arial" pitchFamily="34" charset="-122"/>
                 <a:cs typeface="Arial" pitchFamily="34" charset="-120"/>
               </a:rPr>
-              <a:t>– The buddy rehearsal is the most useful feedback. Encourage </a:t>
-            </a:r>
-            <a:pPr algn="l" indent="0" marL="0">
-              <a:lnSpc>
-                <a:spcPts val="1680"/>
-              </a:lnSpc>
-              <a:spcBef>
-                <a:spcPts val="300"/>
-              </a:spcBef>
-              <a:spcAft>
-                <a:spcPts val="300"/>
-              </a:spcAft>
-              <a:buNone/>
-            </a:pPr>
-            <a:r>
-              <a:rPr lang="en-US" sz="1200" i="1" dirty="0">
-                <a:solidFill>
-                  <a:srgbClr val="1C2833"/>
-                </a:solidFill>
-                <a:latin typeface="Arial" pitchFamily="34" charset="0"/>
-                <a:ea typeface="Arial" pitchFamily="34" charset="-122"/>
-                <a:cs typeface="Arial" pitchFamily="34" charset="-120"/>
-              </a:rPr>
-              <a:t>kind and specific</a:t>
-            </a:r>
-            <a:pPr algn="l" indent="0" marL="0">
-              <a:lnSpc>
-                <a:spcPts val="1680"/>
-              </a:lnSpc>
-              <a:spcBef>
-                <a:spcPts val="300"/>
-              </a:spcBef>
-              <a:spcAft>
-                <a:spcPts val="300"/>
-              </a:spcAft>
-              <a:buNone/>
-            </a:pPr>
-            <a:r>
-              <a:rPr lang="en-US" sz="1200" dirty="0">
-                <a:solidFill>
-                  <a:srgbClr val="1C2833"/>
-                </a:solidFill>
-                <a:latin typeface="Arial" pitchFamily="34" charset="0"/>
-                <a:ea typeface="Arial" pitchFamily="34" charset="-122"/>
-                <a:cs typeface="Arial" pitchFamily="34" charset="-120"/>
-              </a:rPr>
-              <a:t> feedback.</a:t>
+              <a:t>Finalise. Bring everything tomorrow.</a:t>
             </a:r>
             <a:endParaRPr lang="en-US" sz="1200" dirty="0"/>
           </a:p>
